--- a/deliverables/02_new_deck/Applesoft_Loaded_Dice_EXPANDED.pptx
+++ b/deliverables/02_new_deck/Applesoft_Loaded_Dice_EXPANDED.pptx
@@ -7018,7 +7018,7 @@
         <p:spPr>
           <a:xfrm>
             <a:off x="8092440" y="1783080"/>
-            <a:ext cx="3429000" cy="1115568"/>
+            <a:ext cx="3429000" cy="1188719"/>
           </a:xfrm>
           <a:prstGeom prst="rect">
             <a:avLst/>
@@ -7062,7 +7062,7 @@
         <p:spPr>
           <a:xfrm>
             <a:off x="8321040" y="1947672"/>
-            <a:ext cx="3063240" cy="886968"/>
+            <a:ext cx="3063240" cy="960119"/>
           </a:xfrm>
           <a:prstGeom prst="rect">
             <a:avLst/>
@@ -7132,8 +7132,8 @@
         </p:nvSpPr>
         <p:spPr>
           <a:xfrm>
-            <a:off x="8092440" y="3063239"/>
-            <a:ext cx="3429000" cy="1115568"/>
+            <a:off x="8092440" y="3136391"/>
+            <a:ext cx="3429000" cy="1188719"/>
           </a:xfrm>
           <a:prstGeom prst="rect">
             <a:avLst/>
@@ -7176,8 +7176,8 @@
         </p:nvSpPr>
         <p:spPr>
           <a:xfrm>
-            <a:off x="8321040" y="3227832"/>
-            <a:ext cx="3063240" cy="886968"/>
+            <a:off x="8321040" y="3300984"/>
+            <a:ext cx="3063240" cy="960119"/>
           </a:xfrm>
           <a:prstGeom prst="rect">
             <a:avLst/>
@@ -7247,8 +7247,8 @@
         </p:nvSpPr>
         <p:spPr>
           <a:xfrm>
-            <a:off x="8092440" y="4343400"/>
-            <a:ext cx="3429000" cy="841247"/>
+            <a:off x="8092440" y="4489703"/>
+            <a:ext cx="3429000" cy="1143000"/>
           </a:xfrm>
           <a:prstGeom prst="rect">
             <a:avLst/>
@@ -7291,8 +7291,8 @@
         </p:nvSpPr>
         <p:spPr>
           <a:xfrm>
-            <a:off x="8321040" y="4507992"/>
-            <a:ext cx="3063240" cy="612647"/>
+            <a:off x="8321040" y="4654295"/>
+            <a:ext cx="3063240" cy="914400"/>
           </a:xfrm>
           <a:prstGeom prst="rect">
             <a:avLst/>
@@ -12482,7 +12482,7 @@
         <p:spPr>
           <a:xfrm>
             <a:off x="8092440" y="1783080"/>
-            <a:ext cx="3429000" cy="1938528"/>
+            <a:ext cx="3429000" cy="2203704"/>
           </a:xfrm>
           <a:prstGeom prst="rect">
             <a:avLst/>
@@ -12526,7 +12526,7 @@
         <p:spPr>
           <a:xfrm>
             <a:off x="8321040" y="1947672"/>
-            <a:ext cx="3063240" cy="1709928"/>
+            <a:ext cx="3063240" cy="1975104"/>
           </a:xfrm>
           <a:prstGeom prst="rect">
             <a:avLst/>
@@ -15649,7 +15649,7 @@
         <p:spPr>
           <a:xfrm>
             <a:off x="8092440" y="1234440"/>
-            <a:ext cx="3429000" cy="1389888"/>
+            <a:ext cx="3429000" cy="1892808"/>
           </a:xfrm>
           <a:prstGeom prst="rect">
             <a:avLst/>
@@ -15693,7 +15693,7 @@
         <p:spPr>
           <a:xfrm>
             <a:off x="8321040" y="1399032"/>
-            <a:ext cx="3063240" cy="1161288"/>
+            <a:ext cx="3063240" cy="1664208"/>
           </a:xfrm>
           <a:prstGeom prst="rect">
             <a:avLst/>
@@ -15779,8 +15779,8 @@
         </p:nvSpPr>
         <p:spPr>
           <a:xfrm>
-            <a:off x="8092440" y="2788920"/>
-            <a:ext cx="3429000" cy="1115568"/>
+            <a:off x="8092440" y="3291840"/>
+            <a:ext cx="3429000" cy="1627632"/>
           </a:xfrm>
           <a:prstGeom prst="rect">
             <a:avLst/>
@@ -15823,8 +15823,8 @@
         </p:nvSpPr>
         <p:spPr>
           <a:xfrm>
-            <a:off x="8321040" y="2953512"/>
-            <a:ext cx="3063240" cy="886968"/>
+            <a:off x="8321040" y="3456432"/>
+            <a:ext cx="3063240" cy="1399032"/>
           </a:xfrm>
           <a:prstGeom prst="rect">
             <a:avLst/>
@@ -20484,7 +20484,7 @@
                 </a:solidFill>
                 <a:latin typeface="Arial"/>
               </a:rPr>
-              <a:t>Idiom: `RND(−TI)`</a:t>
+              <a:t>Idiom: RND(−TI)</a:t>
             </a:r>
           </a:p>
         </p:txBody>
@@ -22970,7 +22970,7 @@
         <p:spPr>
           <a:xfrm>
             <a:off x="8092440" y="1783080"/>
-            <a:ext cx="3429000" cy="1389888"/>
+            <a:ext cx="3429000" cy="1453895"/>
           </a:xfrm>
           <a:prstGeom prst="rect">
             <a:avLst/>
@@ -23014,7 +23014,7 @@
         <p:spPr>
           <a:xfrm>
             <a:off x="8321040" y="1947672"/>
-            <a:ext cx="3063240" cy="1161288"/>
+            <a:ext cx="3063240" cy="1225295"/>
           </a:xfrm>
           <a:prstGeom prst="rect">
             <a:avLst/>
@@ -23100,8 +23100,8 @@
         </p:nvSpPr>
         <p:spPr>
           <a:xfrm>
-            <a:off x="8092440" y="3337560"/>
-            <a:ext cx="3429000" cy="1389888"/>
+            <a:off x="8092440" y="3401568"/>
+            <a:ext cx="3429000" cy="1453895"/>
           </a:xfrm>
           <a:prstGeom prst="rect">
             <a:avLst/>
@@ -23144,8 +23144,8 @@
         </p:nvSpPr>
         <p:spPr>
           <a:xfrm>
-            <a:off x="8321040" y="3502152"/>
-            <a:ext cx="3063240" cy="1161288"/>
+            <a:off x="8321040" y="3566160"/>
+            <a:ext cx="3063240" cy="1225295"/>
           </a:xfrm>
           <a:prstGeom prst="rect">
             <a:avLst/>
@@ -23231,8 +23231,8 @@
         </p:nvSpPr>
         <p:spPr>
           <a:xfrm>
-            <a:off x="8092440" y="4892040"/>
-            <a:ext cx="3429000" cy="841247"/>
+            <a:off x="8092440" y="5020055"/>
+            <a:ext cx="3429000" cy="1143000"/>
           </a:xfrm>
           <a:prstGeom prst="rect">
             <a:avLst/>
@@ -23275,8 +23275,8 @@
         </p:nvSpPr>
         <p:spPr>
           <a:xfrm>
-            <a:off x="8321040" y="5056631"/>
-            <a:ext cx="3063240" cy="612647"/>
+            <a:off x="8321040" y="5184647"/>
+            <a:ext cx="3063240" cy="914400"/>
           </a:xfrm>
           <a:prstGeom prst="rect">
             <a:avLst/>
@@ -24334,7 +24334,7 @@
         <p:spPr>
           <a:xfrm>
             <a:off x="8092440" y="1783080"/>
-            <a:ext cx="3429000" cy="1115568"/>
+            <a:ext cx="3429000" cy="1188719"/>
           </a:xfrm>
           <a:prstGeom prst="rect">
             <a:avLst/>
@@ -24378,7 +24378,7 @@
         <p:spPr>
           <a:xfrm>
             <a:off x="8321040" y="1947672"/>
-            <a:ext cx="3063240" cy="886968"/>
+            <a:ext cx="3063240" cy="960119"/>
           </a:xfrm>
           <a:prstGeom prst="rect">
             <a:avLst/>
@@ -24448,8 +24448,8 @@
         </p:nvSpPr>
         <p:spPr>
           <a:xfrm>
-            <a:off x="8092440" y="3063239"/>
-            <a:ext cx="3429000" cy="1115568"/>
+            <a:off x="8092440" y="3136391"/>
+            <a:ext cx="3429000" cy="1188719"/>
           </a:xfrm>
           <a:prstGeom prst="rect">
             <a:avLst/>
@@ -24492,8 +24492,8 @@
         </p:nvSpPr>
         <p:spPr>
           <a:xfrm>
-            <a:off x="8321040" y="3227832"/>
-            <a:ext cx="3063240" cy="886968"/>
+            <a:off x="8321040" y="3300984"/>
+            <a:ext cx="3063240" cy="960119"/>
           </a:xfrm>
           <a:prstGeom prst="rect">
             <a:avLst/>
